--- a/presentations/Day 5 - From ML to AI-Enabled Workflows/01_evidence_package_synthesis.pptx
+++ b/presentations/Day 5 - From ML to AI-Enabled Workflows/01_evidence_package_synthesis.pptx
@@ -5,7 +5,7 @@
     <p:sldMasterId id="2147483648" r:id="rId1"/>
   </p:sldMasterIdLst>
   <p:notesMasterIdLst>
-    <p:notesMasterId r:id="rId19"/>
+    <p:notesMasterId r:id="rId20"/>
   </p:notesMasterIdLst>
   <p:sldIdLst>
     <p:sldId id="256" r:id="rId2"/>
@@ -21,10 +21,11 @@
     <p:sldId id="269" r:id="rId12"/>
     <p:sldId id="270" r:id="rId13"/>
     <p:sldId id="271" r:id="rId14"/>
-    <p:sldId id="272" r:id="rId15"/>
-    <p:sldId id="273" r:id="rId16"/>
-    <p:sldId id="261" r:id="rId17"/>
-    <p:sldId id="274" r:id="rId18"/>
+    <p:sldId id="275" r:id="rId15"/>
+    <p:sldId id="272" r:id="rId16"/>
+    <p:sldId id="273" r:id="rId17"/>
+    <p:sldId id="261" r:id="rId18"/>
+    <p:sldId id="274" r:id="rId19"/>
   </p:sldIdLst>
   <p:sldSz cx="12192000" cy="6858000"/>
   <p:notesSz cx="6858000" cy="12192000"/>
@@ -678,7 +679,13 @@
   <p:cSld>
     <p:spTree>
       <p:nvGrpSpPr>
-        <p:cNvPr id="1" name=""/>
+        <p:cNvPr id="1" name="">
+          <a:extLst>
+            <a:ext uri="{FF2B5EF4-FFF2-40B4-BE49-F238E27FC236}">
+              <a16:creationId xmlns:a16="http://schemas.microsoft.com/office/drawing/2014/main" id="{3B49F26A-6F5E-B0E5-7A12-3557B00E0F50}"/>
+            </a:ext>
+          </a:extLst>
+        </p:cNvPr>
         <p:cNvGrpSpPr/>
         <p:nvPr/>
       </p:nvGrpSpPr>
@@ -692,7 +699,13 @@
       </p:grpSpPr>
       <p:sp>
         <p:nvSpPr>
-          <p:cNvPr id="2" name="Slide Image Placeholder 1"/>
+          <p:cNvPr id="2" name="Slide Image Placeholder 1">
+            <a:extLst>
+              <a:ext uri="{FF2B5EF4-FFF2-40B4-BE49-F238E27FC236}">
+                <a16:creationId xmlns:a16="http://schemas.microsoft.com/office/drawing/2014/main" id="{07642E2E-DE70-1F93-B2FF-C46041D205DC}"/>
+              </a:ext>
+            </a:extLst>
+          </p:cNvPr>
           <p:cNvSpPr>
             <a:spLocks noGrp="1" noRot="1" noChangeAspect="1"/>
           </p:cNvSpPr>
@@ -704,7 +717,13 @@
       </p:sp>
       <p:sp>
         <p:nvSpPr>
-          <p:cNvPr id="3" name="Notes Placeholder 2"/>
+          <p:cNvPr id="3" name="Notes Placeholder 2">
+            <a:extLst>
+              <a:ext uri="{FF2B5EF4-FFF2-40B4-BE49-F238E27FC236}">
+                <a16:creationId xmlns:a16="http://schemas.microsoft.com/office/drawing/2014/main" id="{A38F42C0-C6A3-B3E1-2FC5-A58A4A6CE8CE}"/>
+              </a:ext>
+            </a:extLst>
+          </p:cNvPr>
           <p:cNvSpPr>
             <a:spLocks noGrp="1"/>
           </p:cNvSpPr>
@@ -723,7 +742,13 @@
       </p:sp>
       <p:sp>
         <p:nvSpPr>
-          <p:cNvPr id="4" name="Slide Number Placeholder 3"/>
+          <p:cNvPr id="4" name="Slide Number Placeholder 3">
+            <a:extLst>
+              <a:ext uri="{FF2B5EF4-FFF2-40B4-BE49-F238E27FC236}">
+                <a16:creationId xmlns:a16="http://schemas.microsoft.com/office/drawing/2014/main" id="{D9EC8510-C18E-FEED-79B2-B73A46F69921}"/>
+              </a:ext>
+            </a:extLst>
+          </p:cNvPr>
           <p:cNvSpPr>
             <a:spLocks noGrp="1"/>
           </p:cNvSpPr>
@@ -747,7 +772,7 @@
     </p:spTree>
     <p:extLst>
       <p:ext uri="{BB962C8B-B14F-4D97-AF65-F5344CB8AC3E}">
-        <p14:creationId xmlns:p14="http://schemas.microsoft.com/office/powerpoint/2010/main" val="1024086991"/>
+        <p14:creationId xmlns:p14="http://schemas.microsoft.com/office/powerpoint/2010/main" val="1379302191"/>
       </p:ext>
     </p:extLst>
   </p:cSld>
@@ -991,6 +1016,90 @@
             <a:fld id="{F7021451-1387-4CA6-816F-3879F97B5CBC}" type="slidenum">
               <a:rPr lang="en-US"/>
               <a:t>17</a:t>
+            </a:fld>
+            <a:endParaRPr lang="en-US"/>
+          </a:p>
+        </p:txBody>
+      </p:sp>
+    </p:spTree>
+    <p:extLst>
+      <p:ext uri="{BB962C8B-B14F-4D97-AF65-F5344CB8AC3E}">
+        <p14:creationId xmlns:p14="http://schemas.microsoft.com/office/powerpoint/2010/main" val="1024086991"/>
+      </p:ext>
+    </p:extLst>
+  </p:cSld>
+  <p:clrMapOvr>
+    <a:masterClrMapping/>
+  </p:clrMapOvr>
+</p:notes>
+</file>
+
+<file path=ppt/notesSlides/notesSlide18.xml><?xml version="1.0" encoding="utf-8"?>
+<p:notes xmlns:a="http://schemas.openxmlformats.org/drawingml/2006/main" xmlns:r="http://schemas.openxmlformats.org/officeDocument/2006/relationships" xmlns:p="http://schemas.openxmlformats.org/presentationml/2006/main">
+  <p:cSld>
+    <p:spTree>
+      <p:nvGrpSpPr>
+        <p:cNvPr id="1" name=""/>
+        <p:cNvGrpSpPr/>
+        <p:nvPr/>
+      </p:nvGrpSpPr>
+      <p:grpSpPr>
+        <a:xfrm>
+          <a:off x="0" y="0"/>
+          <a:ext cx="0" cy="0"/>
+          <a:chOff x="0" y="0"/>
+          <a:chExt cx="0" cy="0"/>
+        </a:xfrm>
+      </p:grpSpPr>
+      <p:sp>
+        <p:nvSpPr>
+          <p:cNvPr id="2" name="Slide Image Placeholder 1"/>
+          <p:cNvSpPr>
+            <a:spLocks noGrp="1" noRot="1" noChangeAspect="1"/>
+          </p:cNvSpPr>
+          <p:nvPr>
+            <p:ph type="sldImg"/>
+          </p:nvPr>
+        </p:nvSpPr>
+        <p:spPr/>
+      </p:sp>
+      <p:sp>
+        <p:nvSpPr>
+          <p:cNvPr id="3" name="Notes Placeholder 2"/>
+          <p:cNvSpPr>
+            <a:spLocks noGrp="1"/>
+          </p:cNvSpPr>
+          <p:nvPr>
+            <p:ph type="body" idx="1"/>
+          </p:nvPr>
+        </p:nvSpPr>
+        <p:spPr/>
+        <p:txBody>
+          <a:bodyPr/>
+          <a:lstStyle/>
+          <a:p>
+            <a:endParaRPr lang="en-US" dirty="0"/>
+          </a:p>
+        </p:txBody>
+      </p:sp>
+      <p:sp>
+        <p:nvSpPr>
+          <p:cNvPr id="4" name="Slide Number Placeholder 3"/>
+          <p:cNvSpPr>
+            <a:spLocks noGrp="1"/>
+          </p:cNvSpPr>
+          <p:nvPr>
+            <p:ph type="sldNum" sz="quarter" idx="10"/>
+          </p:nvPr>
+        </p:nvSpPr>
+        <p:spPr/>
+        <p:txBody>
+          <a:bodyPr/>
+          <a:lstStyle/>
+          <a:p>
+            <a:fld id="{F7021451-1387-4CA6-816F-3879F97B5CBC}" type="slidenum">
+              <a:rPr lang="en-US"/>
+              <a:t>18</a:t>
             </a:fld>
             <a:endParaRPr lang="en-US"/>
           </a:p>
@@ -4991,37 +5100,19 @@
                 <a:ea typeface="Courier New" pitchFamily="34" charset="-122"/>
                 <a:cs typeface="Courier New" pitchFamily="34" charset="-120"/>
               </a:rPr>
-              <a:t>You are assisting a process engineer. Use only the evidence provided below.</a:t>
-            </a:r>
-            <a:endParaRPr lang="en-US" sz="1150" dirty="0"/>
-          </a:p>
-          <a:p>
-            <a:pPr marL="0" indent="0">
-              <a:buNone/>
-            </a:pPr>
+              <a:t>You are assisting a </a:t>
+            </a:r>
             <a:r>
               <a:rPr lang="en-US" sz="1150" dirty="0">
                 <a:solidFill>
-                  <a:srgbClr val="1F2933"/>
+                  <a:srgbClr val="FF0000"/>
                 </a:solidFill>
                 <a:latin typeface="Courier New" pitchFamily="34" charset="0"/>
                 <a:ea typeface="Courier New" pitchFamily="34" charset="-122"/>
                 <a:cs typeface="Courier New" pitchFamily="34" charset="-120"/>
               </a:rPr>
-              <a:t>Do not invent causes, variables, or performance results.</a:t>
-            </a:r>
-            <a:endParaRPr lang="en-US" sz="1150" dirty="0"/>
-          </a:p>
-          <a:p>
-            <a:pPr marL="0" indent="0">
-              <a:buNone/>
-            </a:pPr>
-            <a:endParaRPr lang="en-US" sz="1150" dirty="0"/>
-          </a:p>
-          <a:p>
-            <a:pPr marL="0" indent="0">
-              <a:buNone/>
-            </a:pPr>
+              <a:t>process engineer</a:t>
+            </a:r>
             <a:r>
               <a:rPr lang="en-US" sz="1150" dirty="0">
                 <a:solidFill>
@@ -5031,7 +5122,7 @@
                 <a:ea typeface="Courier New" pitchFamily="34" charset="-122"/>
                 <a:cs typeface="Courier New" pitchFamily="34" charset="-120"/>
               </a:rPr>
-              <a:t>Evidence:</a:t>
+              <a:t>. Use only the evidence provided below.</a:t>
             </a:r>
             <a:endParaRPr lang="en-US" sz="1150" dirty="0"/>
           </a:p>
@@ -5048,7 +5139,7 @@
                 <a:ea typeface="Courier New" pitchFamily="34" charset="-122"/>
                 <a:cs typeface="Courier New" pitchFamily="34" charset="-120"/>
               </a:rPr>
-              <a:t>- Dataset: 220 process runs; 20% defective.</a:t>
+              <a:t>Do not invent causes, variables, or performance results.</a:t>
             </a:r>
             <a:endParaRPr lang="en-US" sz="1150" dirty="0"/>
           </a:p>
@@ -5056,18 +5147,32 @@
             <a:pPr marL="0" indent="0">
               <a:buNone/>
             </a:pPr>
+            <a:endParaRPr lang="en-US" sz="1150" dirty="0">
+              <a:solidFill>
+                <a:srgbClr val="FFC000"/>
+              </a:solidFill>
+            </a:endParaRPr>
+          </a:p>
+          <a:p>
+            <a:pPr marL="0" indent="0">
+              <a:buNone/>
+            </a:pPr>
             <a:r>
               <a:rPr lang="en-US" sz="1150" dirty="0">
                 <a:solidFill>
-                  <a:srgbClr val="1F2933"/>
+                  <a:srgbClr val="FFC000"/>
                 </a:solidFill>
                 <a:latin typeface="Courier New" pitchFamily="34" charset="0"/>
                 <a:ea typeface="Courier New" pitchFamily="34" charset="-122"/>
                 <a:cs typeface="Courier New" pitchFamily="34" charset="-120"/>
               </a:rPr>
-              <a:t>- Inputs: temperature, pressure, speed, vibration.</a:t>
-            </a:r>
-            <a:endParaRPr lang="en-US" sz="1150" dirty="0"/>
+              <a:t>Evidence:</a:t>
+            </a:r>
+            <a:endParaRPr lang="en-US" sz="1150" dirty="0">
+              <a:solidFill>
+                <a:srgbClr val="FFC000"/>
+              </a:solidFill>
+            </a:endParaRPr>
           </a:p>
           <a:p>
             <a:pPr marL="0" indent="0">
@@ -5082,7 +5187,7 @@
                 <a:ea typeface="Courier New" pitchFamily="34" charset="-122"/>
                 <a:cs typeface="Courier New" pitchFamily="34" charset="-120"/>
               </a:rPr>
-              <a:t>- Baseline: accuracy 0.800; defect recall 0.000.</a:t>
+              <a:t>- Dataset: 220 process runs; 20% defective.</a:t>
             </a:r>
             <a:endParaRPr lang="en-US" sz="1150" dirty="0"/>
           </a:p>
@@ -5099,7 +5204,7 @@
                 <a:ea typeface="Courier New" pitchFamily="34" charset="-122"/>
                 <a:cs typeface="Courier New" pitchFamily="34" charset="-120"/>
               </a:rPr>
-              <a:t>- Logistic regression: accuracy 0.855, precision 1.000, recall 0.273, F1 0.429.</a:t>
+              <a:t>- Inputs: temperature, pressure, speed, vibration.</a:t>
             </a:r>
             <a:endParaRPr lang="en-US" sz="1150" dirty="0"/>
           </a:p>
@@ -5116,7 +5221,7 @@
                 <a:ea typeface="Courier New" pitchFamily="34" charset="-122"/>
                 <a:cs typeface="Courier New" pitchFamily="34" charset="-120"/>
               </a:rPr>
-              <a:t>- Confusion matrix: TN=44, FP=0, FN=8, TP=3.</a:t>
+              <a:t>- Baseline: accuracy 0.800; defect recall 0.000.</a:t>
             </a:r>
             <a:endParaRPr lang="en-US" sz="1150" dirty="0"/>
           </a:p>
@@ -5133,14 +5238,8 @@
                 <a:ea typeface="Courier New" pitchFamily="34" charset="-122"/>
                 <a:cs typeface="Courier New" pitchFamily="34" charset="-120"/>
               </a:rPr>
-              <a:t>- Limitations: small dataset, single split, limited inputs, no external validation.</a:t>
-            </a:r>
-            <a:endParaRPr lang="en-US" sz="1150" dirty="0"/>
-          </a:p>
-          <a:p>
-            <a:pPr marL="0" indent="0">
-              <a:buNone/>
-            </a:pPr>
+              <a:t>- Logistic regression: accuracy 0.855, precision 1.000, recall 0.273, F1 0.429.</a:t>
+            </a:r>
             <a:endParaRPr lang="en-US" sz="1150" dirty="0"/>
           </a:p>
           <a:p>
@@ -5156,10 +5255,63 @@
                 <a:ea typeface="Courier New" pitchFamily="34" charset="-122"/>
                 <a:cs typeface="Courier New" pitchFamily="34" charset="-120"/>
               </a:rPr>
-              <a:t>Produce: technical interpretation, manager summary, next analysis, and one unsupported claim.</a:t>
+              <a:t>- Confusion matrix: TN=44, FP=0, FN=8, TP=3.</a:t>
             </a:r>
             <a:endParaRPr lang="en-US" sz="1150" dirty="0"/>
           </a:p>
+          <a:p>
+            <a:pPr marL="0" indent="0">
+              <a:buNone/>
+            </a:pPr>
+            <a:r>
+              <a:rPr lang="en-US" sz="1150" dirty="0">
+                <a:solidFill>
+                  <a:srgbClr val="1F2933"/>
+                </a:solidFill>
+                <a:latin typeface="Courier New" pitchFamily="34" charset="0"/>
+                <a:ea typeface="Courier New" pitchFamily="34" charset="-122"/>
+                <a:cs typeface="Courier New" pitchFamily="34" charset="-120"/>
+              </a:rPr>
+              <a:t>- Limitations: small dataset, single split, limited inputs, no external validation.</a:t>
+            </a:r>
+            <a:endParaRPr lang="en-US" sz="1150" dirty="0"/>
+          </a:p>
+          <a:p>
+            <a:pPr marL="0" indent="0">
+              <a:buNone/>
+            </a:pPr>
+            <a:endParaRPr lang="en-US" sz="1150" dirty="0"/>
+          </a:p>
+          <a:p>
+            <a:pPr marL="0" indent="0">
+              <a:buNone/>
+            </a:pPr>
+            <a:r>
+              <a:rPr lang="en-US" sz="1150" dirty="0">
+                <a:solidFill>
+                  <a:schemeClr val="accent1">
+                    <a:lumMod val="75000"/>
+                  </a:schemeClr>
+                </a:solidFill>
+                <a:latin typeface="Courier New" pitchFamily="34" charset="0"/>
+                <a:ea typeface="Courier New" pitchFamily="34" charset="-122"/>
+                <a:cs typeface="Courier New" pitchFamily="34" charset="-120"/>
+              </a:rPr>
+              <a:t>Produce</a:t>
+            </a:r>
+            <a:r>
+              <a:rPr lang="en-US" sz="1150" dirty="0">
+                <a:solidFill>
+                  <a:srgbClr val="1F2933"/>
+                </a:solidFill>
+                <a:latin typeface="Courier New" pitchFamily="34" charset="0"/>
+                <a:ea typeface="Courier New" pitchFamily="34" charset="-122"/>
+                <a:cs typeface="Courier New" pitchFamily="34" charset="-120"/>
+              </a:rPr>
+              <a:t>: technical interpretation, manager summary, next analysis, and one unsupported claim.</a:t>
+            </a:r>
+            <a:endParaRPr lang="en-US" sz="1150" dirty="0"/>
+          </a:p>
         </p:txBody>
       </p:sp>
       <p:sp>
@@ -5170,8 +5322,8 @@
         </p:nvSpPr>
         <p:spPr>
           <a:xfrm>
-            <a:off x="960120" y="5650992"/>
-            <a:ext cx="9875520" cy="256032"/>
+            <a:off x="944880" y="5029200"/>
+            <a:ext cx="9875520" cy="1005840"/>
           </a:xfrm>
           <a:prstGeom prst="rect">
             <a:avLst/>
@@ -5187,14 +5339,57 @@
               <a:buNone/>
             </a:pPr>
             <a:r>
-              <a:rPr lang="en-US" sz="3200" b="1" dirty="0">
-                <a:solidFill>
-                  <a:srgbClr val="CC0000"/>
-                </a:solidFill>
-              </a:rPr>
-              <a:t>Prompt pattern: role + evidence + constraints + requested structure.</a:t>
-            </a:r>
-            <a:endParaRPr lang="en-US" sz="3200" dirty="0"/>
+              <a:rPr lang="en-US" sz="3200" dirty="0"/>
+              <a:t>Prompt pattern: </a:t>
+            </a:r>
+            <a:r>
+              <a:rPr lang="en-US" sz="3200" dirty="0">
+                <a:solidFill>
+                  <a:srgbClr val="FF0000"/>
+                </a:solidFill>
+              </a:rPr>
+              <a:t>role</a:t>
+            </a:r>
+            <a:r>
+              <a:rPr lang="en-US" sz="3200" dirty="0"/>
+              <a:t> + </a:t>
+            </a:r>
+            <a:r>
+              <a:rPr lang="en-US" sz="3200" dirty="0">
+                <a:solidFill>
+                  <a:srgbClr val="FFC000"/>
+                </a:solidFill>
+              </a:rPr>
+              <a:t>evidence</a:t>
+            </a:r>
+            <a:r>
+              <a:rPr lang="en-US" sz="3200" dirty="0"/>
+              <a:t> + </a:t>
+            </a:r>
+            <a:r>
+              <a:rPr lang="en-US" sz="3200" dirty="0">
+                <a:solidFill>
+                  <a:srgbClr val="FFC000"/>
+                </a:solidFill>
+              </a:rPr>
+              <a:t>constraints</a:t>
+            </a:r>
+            <a:r>
+              <a:rPr lang="en-US" sz="3200" dirty="0"/>
+              <a:t> + </a:t>
+            </a:r>
+            <a:r>
+              <a:rPr lang="en-US" sz="3200" dirty="0">
+                <a:solidFill>
+                  <a:srgbClr val="00B0F0"/>
+                </a:solidFill>
+              </a:rPr>
+              <a:t>requested</a:t>
+            </a:r>
+            <a:r>
+              <a:rPr lang="en-US" sz="3200" dirty="0"/>
+              <a:t> structure.</a:t>
+            </a:r>
           </a:p>
         </p:txBody>
       </p:sp>
@@ -5211,7 +5406,13 @@
   <p:cSld>
     <p:spTree>
       <p:nvGrpSpPr>
-        <p:cNvPr id="1" name=""/>
+        <p:cNvPr id="1" name="">
+          <a:extLst>
+            <a:ext uri="{FF2B5EF4-FFF2-40B4-BE49-F238E27FC236}">
+              <a16:creationId xmlns:a16="http://schemas.microsoft.com/office/drawing/2014/main" id="{67B459F1-93E2-E534-9F12-45813113BEEA}"/>
+            </a:ext>
+          </a:extLst>
+        </p:cNvPr>
         <p:cNvGrpSpPr/>
         <p:nvPr/>
       </p:nvGrpSpPr>
@@ -5225,7 +5426,13 @@
       </p:grpSpPr>
       <p:sp>
         <p:nvSpPr>
-          <p:cNvPr id="2" name="Text 0"/>
+          <p:cNvPr id="2" name="Text 0">
+            <a:extLst>
+              <a:ext uri="{FF2B5EF4-FFF2-40B4-BE49-F238E27FC236}">
+                <a16:creationId xmlns:a16="http://schemas.microsoft.com/office/drawing/2014/main" id="{7E8E9DFE-2599-3A5E-8D5C-04F24626872C}"/>
+              </a:ext>
+            </a:extLst>
+          </p:cNvPr>
           <p:cNvSpPr/>
           <p:nvPr/>
         </p:nvSpPr>
@@ -5264,7 +5471,13 @@
       </p:sp>
       <p:sp>
         <p:nvSpPr>
-          <p:cNvPr id="3" name="Text 1"/>
+          <p:cNvPr id="3" name="Text 1">
+            <a:extLst>
+              <a:ext uri="{FF2B5EF4-FFF2-40B4-BE49-F238E27FC236}">
+                <a16:creationId xmlns:a16="http://schemas.microsoft.com/office/drawing/2014/main" id="{C3D22EDB-B078-49B1-4E2A-CD26B7DF32E4}"/>
+              </a:ext>
+            </a:extLst>
+          </p:cNvPr>
           <p:cNvSpPr/>
           <p:nvPr/>
         </p:nvSpPr>
@@ -5303,7 +5516,13 @@
       </p:sp>
       <p:sp>
         <p:nvSpPr>
-          <p:cNvPr id="4" name="Shape 2"/>
+          <p:cNvPr id="4" name="Shape 2">
+            <a:extLst>
+              <a:ext uri="{FF2B5EF4-FFF2-40B4-BE49-F238E27FC236}">
+                <a16:creationId xmlns:a16="http://schemas.microsoft.com/office/drawing/2014/main" id="{C289D1DF-C284-5037-0732-7DF06E9A15A9}"/>
+              </a:ext>
+            </a:extLst>
+          </p:cNvPr>
           <p:cNvSpPr/>
           <p:nvPr/>
         </p:nvSpPr>
@@ -5333,7 +5552,13 @@
       </p:sp>
       <p:sp>
         <p:nvSpPr>
-          <p:cNvPr id="5" name="Text 3"/>
+          <p:cNvPr id="5" name="Text 3">
+            <a:extLst>
+              <a:ext uri="{FF2B5EF4-FFF2-40B4-BE49-F238E27FC236}">
+                <a16:creationId xmlns:a16="http://schemas.microsoft.com/office/drawing/2014/main" id="{F8A3B050-412D-FA5D-688F-49D7C0D9BBDE}"/>
+              </a:ext>
+            </a:extLst>
+          </p:cNvPr>
           <p:cNvSpPr/>
           <p:nvPr/>
         </p:nvSpPr>
@@ -5366,7 +5591,7 @@
                 <a:ea typeface="Aptos Display" pitchFamily="34" charset="-122"/>
                 <a:cs typeface="Aptos Display" pitchFamily="34" charset="-120"/>
               </a:rPr>
-              <a:t>Grounded Response Structure</a:t>
+              <a:t>Step 8: prepare the evidence for an LLM</a:t>
             </a:r>
             <a:endParaRPr lang="en-US" sz="2400" dirty="0"/>
           </a:p>
@@ -5374,7 +5599,13 @@
       </p:sp>
       <p:sp>
         <p:nvSpPr>
-          <p:cNvPr id="6" name="Text 4"/>
+          <p:cNvPr id="6" name="Text 4">
+            <a:extLst>
+              <a:ext uri="{FF2B5EF4-FFF2-40B4-BE49-F238E27FC236}">
+                <a16:creationId xmlns:a16="http://schemas.microsoft.com/office/drawing/2014/main" id="{74AA9417-04BC-C33D-2DAE-CC3403DAC045}"/>
+              </a:ext>
+            </a:extLst>
+          </p:cNvPr>
           <p:cNvSpPr/>
           <p:nvPr/>
         </p:nvSpPr>
@@ -5402,7 +5633,7 @@
                   <a:srgbClr val="4B5563"/>
                 </a:solidFill>
               </a:rPr>
-              <a:t>12</a:t>
+              <a:t>11</a:t>
             </a:r>
             <a:endParaRPr lang="en-US" sz="800" dirty="0"/>
           </a:p>
@@ -5410,775 +5641,160 @@
       </p:sp>
       <p:sp>
         <p:nvSpPr>
-          <p:cNvPr id="7" name="Shape 5"/>
-          <p:cNvSpPr/>
-          <p:nvPr/>
-        </p:nvSpPr>
-        <p:spPr>
-          <a:xfrm>
-            <a:off x="685800" y="1417320"/>
-            <a:ext cx="2423160" cy="713232"/>
-          </a:xfrm>
-          <a:prstGeom prst="rect">
-            <a:avLst/>
-          </a:prstGeom>
-          <a:solidFill>
-            <a:srgbClr val="FDEAEA"/>
-          </a:solidFill>
-          <a:ln w="8890">
-            <a:solidFill>
-              <a:srgbClr val="E5E7EB"/>
-            </a:solidFill>
-            <a:prstDash val="solid"/>
-          </a:ln>
-        </p:spPr>
-        <p:txBody>
-          <a:bodyPr/>
-          <a:lstStyle/>
-          <a:p>
-            <a:endParaRPr lang="en-US"/>
-          </a:p>
-        </p:txBody>
-      </p:sp>
-      <p:sp>
-        <p:nvSpPr>
-          <p:cNvPr id="8" name="Text 6"/>
-          <p:cNvSpPr/>
-          <p:nvPr/>
-        </p:nvSpPr>
-        <p:spPr>
-          <a:xfrm>
-            <a:off x="740664" y="1490472"/>
-            <a:ext cx="2313432" cy="603504"/>
-          </a:xfrm>
-          <a:prstGeom prst="rect">
-            <a:avLst/>
-          </a:prstGeom>
-          <a:noFill/>
-          <a:ln/>
-        </p:spPr>
-        <p:txBody>
-          <a:bodyPr wrap="square" lIns="254" tIns="254" rIns="254" bIns="254" rtlCol="0" anchor="ctr">
-            <a:normAutofit/>
+          <p:cNvPr id="9" name="Text 7">
+            <a:extLst>
+              <a:ext uri="{FF2B5EF4-FFF2-40B4-BE49-F238E27FC236}">
+                <a16:creationId xmlns:a16="http://schemas.microsoft.com/office/drawing/2014/main" id="{095CBF21-ADF9-B794-C314-D436A7B7A00A}"/>
+              </a:ext>
+            </a:extLst>
+          </p:cNvPr>
+          <p:cNvSpPr/>
+          <p:nvPr/>
+        </p:nvSpPr>
+        <p:spPr>
+          <a:xfrm>
+            <a:off x="800100" y="5455920"/>
+            <a:ext cx="9875520" cy="1005840"/>
+          </a:xfrm>
+          <a:prstGeom prst="rect">
+            <a:avLst/>
+          </a:prstGeom>
+          <a:noFill/>
+          <a:ln/>
+        </p:spPr>
+        <p:txBody>
+          <a:bodyPr wrap="square" lIns="0" tIns="0" rIns="0" bIns="0" rtlCol="0" anchor="ctr"/>
+          <a:lstStyle/>
+          <a:p>
+            <a:pPr marL="0" indent="0">
+              <a:buNone/>
+            </a:pPr>
+            <a:r>
+              <a:rPr lang="en-US" sz="3200" dirty="0"/>
+              <a:t>Prompt pattern: </a:t>
+            </a:r>
+            <a:r>
+              <a:rPr lang="en-US" sz="3200" dirty="0">
+                <a:solidFill>
+                  <a:srgbClr val="FF0000"/>
+                </a:solidFill>
+              </a:rPr>
+              <a:t>role</a:t>
+            </a:r>
+            <a:r>
+              <a:rPr lang="en-US" sz="3200" dirty="0"/>
+              <a:t> + </a:t>
+            </a:r>
+            <a:r>
+              <a:rPr lang="en-US" sz="3200" dirty="0">
+                <a:solidFill>
+                  <a:srgbClr val="FFC000"/>
+                </a:solidFill>
+              </a:rPr>
+              <a:t>evidence</a:t>
+            </a:r>
+            <a:r>
+              <a:rPr lang="en-US" sz="3200" dirty="0"/>
+              <a:t> + </a:t>
+            </a:r>
+            <a:r>
+              <a:rPr lang="en-US" sz="3200" dirty="0">
+                <a:solidFill>
+                  <a:srgbClr val="FFC000"/>
+                </a:solidFill>
+              </a:rPr>
+              <a:t>constraints</a:t>
+            </a:r>
+            <a:r>
+              <a:rPr lang="en-US" sz="3200" dirty="0"/>
+              <a:t> + </a:t>
+            </a:r>
+            <a:r>
+              <a:rPr lang="en-US" sz="3200" dirty="0">
+                <a:solidFill>
+                  <a:srgbClr val="00B0F0"/>
+                </a:solidFill>
+              </a:rPr>
+              <a:t>requested</a:t>
+            </a:r>
+            <a:r>
+              <a:rPr lang="en-US" sz="3200" dirty="0"/>
+              <a:t> structure.</a:t>
+            </a:r>
+          </a:p>
+        </p:txBody>
+      </p:sp>
+      <p:sp>
+        <p:nvSpPr>
+          <p:cNvPr id="11" name="TextBox 10">
+            <a:extLst>
+              <a:ext uri="{FF2B5EF4-FFF2-40B4-BE49-F238E27FC236}">
+                <a16:creationId xmlns:a16="http://schemas.microsoft.com/office/drawing/2014/main" id="{FA91F1EE-340B-5B42-453D-D68A4445541F}"/>
+              </a:ext>
+            </a:extLst>
+          </p:cNvPr>
+          <p:cNvSpPr txBox="1"/>
+          <p:nvPr/>
+        </p:nvSpPr>
+        <p:spPr>
+          <a:xfrm>
+            <a:off x="594360" y="1288534"/>
+            <a:ext cx="6096000" cy="369332"/>
+          </a:xfrm>
+          <a:prstGeom prst="rect">
+            <a:avLst/>
+          </a:prstGeom>
+          <a:noFill/>
+        </p:spPr>
+        <p:txBody>
+          <a:bodyPr wrap="square">
+            <a:spAutoFit/>
           </a:bodyPr>
           <a:lstStyle/>
           <a:p>
-            <a:pPr marL="0" indent="0">
-              <a:buNone/>
-            </a:pPr>
-            <a:r>
-              <a:rPr lang="en-US" sz="1300" b="1" dirty="0">
-                <a:solidFill>
-                  <a:srgbClr val="CC0000"/>
-                </a:solidFill>
-              </a:rPr>
-              <a:t>Section</a:t>
-            </a:r>
-            <a:endParaRPr lang="en-US" sz="1300" dirty="0"/>
-          </a:p>
-        </p:txBody>
-      </p:sp>
-      <p:sp>
-        <p:nvSpPr>
-          <p:cNvPr id="9" name="Shape 7"/>
-          <p:cNvSpPr/>
-          <p:nvPr/>
-        </p:nvSpPr>
-        <p:spPr>
-          <a:xfrm>
-            <a:off x="3108960" y="1417320"/>
-            <a:ext cx="8138160" cy="713232"/>
-          </a:xfrm>
-          <a:prstGeom prst="rect">
-            <a:avLst/>
-          </a:prstGeom>
-          <a:solidFill>
-            <a:srgbClr val="FDEAEA"/>
-          </a:solidFill>
-          <a:ln w="8890">
-            <a:solidFill>
-              <a:srgbClr val="E5E7EB"/>
-            </a:solidFill>
-            <a:prstDash val="solid"/>
-          </a:ln>
-        </p:spPr>
-        <p:txBody>
-          <a:bodyPr/>
-          <a:lstStyle/>
-          <a:p>
-            <a:endParaRPr lang="en-US"/>
-          </a:p>
-        </p:txBody>
-      </p:sp>
-      <p:sp>
-        <p:nvSpPr>
-          <p:cNvPr id="10" name="Text 8"/>
-          <p:cNvSpPr/>
-          <p:nvPr/>
-        </p:nvSpPr>
-        <p:spPr>
-          <a:xfrm>
-            <a:off x="3163824" y="1490472"/>
-            <a:ext cx="8028432" cy="603504"/>
-          </a:xfrm>
-          <a:prstGeom prst="rect">
-            <a:avLst/>
-          </a:prstGeom>
-          <a:noFill/>
-          <a:ln/>
-        </p:spPr>
-        <p:txBody>
-          <a:bodyPr wrap="square" lIns="254" tIns="254" rIns="254" bIns="254" rtlCol="0" anchor="ctr">
-            <a:normAutofit/>
-          </a:bodyPr>
-          <a:lstStyle/>
-          <a:p>
-            <a:pPr marL="0" indent="0">
-              <a:buNone/>
-            </a:pPr>
-            <a:r>
-              <a:rPr lang="en-US" sz="1300" b="1" dirty="0">
-                <a:solidFill>
-                  <a:srgbClr val="CC0000"/>
-                </a:solidFill>
-              </a:rPr>
-              <a:t>Content</a:t>
-            </a:r>
-            <a:endParaRPr lang="en-US" sz="1300" dirty="0"/>
-          </a:p>
-        </p:txBody>
-      </p:sp>
-      <p:sp>
-        <p:nvSpPr>
-          <p:cNvPr id="11" name="Shape 9"/>
-          <p:cNvSpPr/>
-          <p:nvPr/>
-        </p:nvSpPr>
-        <p:spPr>
-          <a:xfrm>
-            <a:off x="685800" y="2130552"/>
-            <a:ext cx="2423160" cy="713232"/>
-          </a:xfrm>
-          <a:prstGeom prst="rect">
-            <a:avLst/>
-          </a:prstGeom>
-          <a:solidFill>
-            <a:srgbClr val="FFFFFF"/>
-          </a:solidFill>
-          <a:ln w="8890">
-            <a:solidFill>
-              <a:srgbClr val="E5E7EB"/>
-            </a:solidFill>
-            <a:prstDash val="solid"/>
-          </a:ln>
-        </p:spPr>
-        <p:txBody>
-          <a:bodyPr/>
-          <a:lstStyle/>
-          <a:p>
-            <a:endParaRPr lang="en-US"/>
-          </a:p>
-        </p:txBody>
-      </p:sp>
-      <p:sp>
-        <p:nvSpPr>
-          <p:cNvPr id="12" name="Text 10"/>
-          <p:cNvSpPr/>
-          <p:nvPr/>
-        </p:nvSpPr>
-        <p:spPr>
-          <a:xfrm>
-            <a:off x="740664" y="2203704"/>
-            <a:ext cx="2313432" cy="603504"/>
-          </a:xfrm>
-          <a:prstGeom prst="rect">
-            <a:avLst/>
-          </a:prstGeom>
-          <a:noFill/>
-          <a:ln/>
-        </p:spPr>
-        <p:txBody>
-          <a:bodyPr wrap="square" lIns="254" tIns="254" rIns="254" bIns="254" rtlCol="0" anchor="ctr">
-            <a:normAutofit/>
-          </a:bodyPr>
-          <a:lstStyle/>
-          <a:p>
-            <a:pPr marL="0" indent="0">
-              <a:buNone/>
-            </a:pPr>
-            <a:r>
-              <a:rPr lang="en-US" sz="1300" b="1" dirty="0">
-                <a:solidFill>
-                  <a:srgbClr val="1F2933"/>
-                </a:solidFill>
-              </a:rPr>
-              <a:t>Technical interpretation</a:t>
-            </a:r>
-            <a:endParaRPr lang="en-US" sz="1300" dirty="0"/>
-          </a:p>
-        </p:txBody>
-      </p:sp>
-      <p:sp>
-        <p:nvSpPr>
-          <p:cNvPr id="13" name="Shape 11"/>
-          <p:cNvSpPr/>
-          <p:nvPr/>
-        </p:nvSpPr>
-        <p:spPr>
-          <a:xfrm>
-            <a:off x="3108960" y="2130552"/>
-            <a:ext cx="8138160" cy="713232"/>
-          </a:xfrm>
-          <a:prstGeom prst="rect">
-            <a:avLst/>
-          </a:prstGeom>
-          <a:solidFill>
-            <a:srgbClr val="FFFFFF"/>
-          </a:solidFill>
-          <a:ln w="8890">
-            <a:solidFill>
-              <a:srgbClr val="E5E7EB"/>
-            </a:solidFill>
-            <a:prstDash val="solid"/>
-          </a:ln>
-        </p:spPr>
-        <p:txBody>
-          <a:bodyPr/>
-          <a:lstStyle/>
-          <a:p>
-            <a:endParaRPr lang="en-US"/>
-          </a:p>
-        </p:txBody>
-      </p:sp>
-      <p:sp>
-        <p:nvSpPr>
-          <p:cNvPr id="14" name="Text 12"/>
-          <p:cNvSpPr/>
-          <p:nvPr/>
-        </p:nvSpPr>
-        <p:spPr>
-          <a:xfrm>
-            <a:off x="3163824" y="2203704"/>
-            <a:ext cx="8028432" cy="603504"/>
-          </a:xfrm>
-          <a:prstGeom prst="rect">
-            <a:avLst/>
-          </a:prstGeom>
-          <a:noFill/>
-          <a:ln/>
-        </p:spPr>
-        <p:txBody>
-          <a:bodyPr wrap="square" lIns="254" tIns="254" rIns="254" bIns="254" rtlCol="0" anchor="ctr">
-            <a:normAutofit/>
-          </a:bodyPr>
-          <a:lstStyle/>
-          <a:p>
-            <a:pPr marL="0" indent="0">
-              <a:buNone/>
-            </a:pPr>
-            <a:r>
-              <a:rPr lang="en-US" sz="1300" dirty="0">
-                <a:solidFill>
-                  <a:srgbClr val="1F2933"/>
-                </a:solidFill>
-              </a:rPr>
-              <a:t>Model improves accuracy but has low defect recall; screening value is limited.</a:t>
-            </a:r>
-            <a:endParaRPr lang="en-US" sz="1300" dirty="0"/>
-          </a:p>
-        </p:txBody>
-      </p:sp>
-      <p:sp>
-        <p:nvSpPr>
-          <p:cNvPr id="15" name="Shape 13"/>
-          <p:cNvSpPr/>
-          <p:nvPr/>
-        </p:nvSpPr>
-        <p:spPr>
-          <a:xfrm>
-            <a:off x="685800" y="2843784"/>
-            <a:ext cx="2423160" cy="713232"/>
-          </a:xfrm>
-          <a:prstGeom prst="rect">
-            <a:avLst/>
-          </a:prstGeom>
-          <a:solidFill>
-            <a:srgbClr val="F8FAFC"/>
-          </a:solidFill>
-          <a:ln w="8890">
-            <a:solidFill>
-              <a:srgbClr val="E5E7EB"/>
-            </a:solidFill>
-            <a:prstDash val="solid"/>
-          </a:ln>
-        </p:spPr>
-        <p:txBody>
-          <a:bodyPr/>
-          <a:lstStyle/>
-          <a:p>
-            <a:endParaRPr lang="en-US"/>
-          </a:p>
-        </p:txBody>
-      </p:sp>
-      <p:sp>
-        <p:nvSpPr>
-          <p:cNvPr id="16" name="Text 14"/>
-          <p:cNvSpPr/>
-          <p:nvPr/>
-        </p:nvSpPr>
-        <p:spPr>
-          <a:xfrm>
-            <a:off x="740664" y="2916936"/>
-            <a:ext cx="2313432" cy="603504"/>
-          </a:xfrm>
-          <a:prstGeom prst="rect">
-            <a:avLst/>
-          </a:prstGeom>
-          <a:noFill/>
-          <a:ln/>
-        </p:spPr>
-        <p:txBody>
-          <a:bodyPr wrap="square" lIns="254" tIns="254" rIns="254" bIns="254" rtlCol="0" anchor="ctr">
-            <a:normAutofit/>
-          </a:bodyPr>
-          <a:lstStyle/>
-          <a:p>
-            <a:pPr marL="0" indent="0">
-              <a:buNone/>
-            </a:pPr>
-            <a:r>
-              <a:rPr lang="en-US" sz="1300" b="1" dirty="0">
-                <a:solidFill>
-                  <a:srgbClr val="1F2933"/>
-                </a:solidFill>
-              </a:rPr>
-              <a:t>Manager summary</a:t>
-            </a:r>
-            <a:endParaRPr lang="en-US" sz="1300" dirty="0"/>
-          </a:p>
-        </p:txBody>
-      </p:sp>
-      <p:sp>
-        <p:nvSpPr>
-          <p:cNvPr id="17" name="Shape 15"/>
-          <p:cNvSpPr/>
-          <p:nvPr/>
-        </p:nvSpPr>
-        <p:spPr>
-          <a:xfrm>
-            <a:off x="3108960" y="2843784"/>
-            <a:ext cx="8138160" cy="713232"/>
-          </a:xfrm>
-          <a:prstGeom prst="rect">
-            <a:avLst/>
-          </a:prstGeom>
-          <a:solidFill>
-            <a:srgbClr val="F8FAFC"/>
-          </a:solidFill>
-          <a:ln w="8890">
-            <a:solidFill>
-              <a:srgbClr val="E5E7EB"/>
-            </a:solidFill>
-            <a:prstDash val="solid"/>
-          </a:ln>
-        </p:spPr>
-        <p:txBody>
-          <a:bodyPr/>
-          <a:lstStyle/>
-          <a:p>
-            <a:endParaRPr lang="en-US"/>
-          </a:p>
-        </p:txBody>
-      </p:sp>
-      <p:sp>
-        <p:nvSpPr>
-          <p:cNvPr id="18" name="Text 16"/>
-          <p:cNvSpPr/>
-          <p:nvPr/>
-        </p:nvSpPr>
-        <p:spPr>
-          <a:xfrm>
-            <a:off x="3163824" y="2916936"/>
-            <a:ext cx="8028432" cy="603504"/>
-          </a:xfrm>
-          <a:prstGeom prst="rect">
-            <a:avLst/>
-          </a:prstGeom>
-          <a:noFill/>
-          <a:ln/>
-        </p:spPr>
-        <p:txBody>
-          <a:bodyPr wrap="square" lIns="254" tIns="254" rIns="254" bIns="254" rtlCol="0" anchor="ctr">
-            <a:normAutofit/>
-          </a:bodyPr>
-          <a:lstStyle/>
-          <a:p>
-            <a:pPr marL="0" indent="0">
-              <a:buNone/>
-            </a:pPr>
-            <a:r>
-              <a:rPr lang="en-US" sz="1300" dirty="0">
-                <a:solidFill>
-                  <a:srgbClr val="1F2933"/>
-                </a:solidFill>
-              </a:rPr>
-              <a:t>Few false alarms, but only about one-quarter of defects detected. Do not replace inspection.</a:t>
-            </a:r>
-            <a:endParaRPr lang="en-US" sz="1300" dirty="0"/>
-          </a:p>
-        </p:txBody>
-      </p:sp>
-      <p:sp>
-        <p:nvSpPr>
-          <p:cNvPr id="19" name="Shape 17"/>
-          <p:cNvSpPr/>
-          <p:nvPr/>
-        </p:nvSpPr>
-        <p:spPr>
-          <a:xfrm>
-            <a:off x="685800" y="3557016"/>
-            <a:ext cx="2423160" cy="713232"/>
-          </a:xfrm>
-          <a:prstGeom prst="rect">
-            <a:avLst/>
-          </a:prstGeom>
-          <a:solidFill>
-            <a:srgbClr val="FFFFFF"/>
-          </a:solidFill>
-          <a:ln w="8890">
-            <a:solidFill>
-              <a:srgbClr val="E5E7EB"/>
-            </a:solidFill>
-            <a:prstDash val="solid"/>
-          </a:ln>
-        </p:spPr>
-        <p:txBody>
-          <a:bodyPr/>
-          <a:lstStyle/>
-          <a:p>
-            <a:endParaRPr lang="en-US"/>
-          </a:p>
-        </p:txBody>
-      </p:sp>
-      <p:sp>
-        <p:nvSpPr>
-          <p:cNvPr id="20" name="Text 18"/>
-          <p:cNvSpPr/>
-          <p:nvPr/>
-        </p:nvSpPr>
-        <p:spPr>
-          <a:xfrm>
-            <a:off x="740664" y="3630168"/>
-            <a:ext cx="2313432" cy="603504"/>
-          </a:xfrm>
-          <a:prstGeom prst="rect">
-            <a:avLst/>
-          </a:prstGeom>
-          <a:noFill/>
-          <a:ln/>
-        </p:spPr>
-        <p:txBody>
-          <a:bodyPr wrap="square" lIns="254" tIns="254" rIns="254" bIns="254" rtlCol="0" anchor="ctr">
-            <a:normAutofit/>
-          </a:bodyPr>
-          <a:lstStyle/>
-          <a:p>
-            <a:pPr marL="0" indent="0">
-              <a:buNone/>
-            </a:pPr>
-            <a:r>
-              <a:rPr lang="en-US" sz="1300" b="1" dirty="0">
-                <a:solidFill>
-                  <a:srgbClr val="1F2933"/>
-                </a:solidFill>
-              </a:rPr>
-              <a:t>Recommended next analysis</a:t>
-            </a:r>
-            <a:endParaRPr lang="en-US" sz="1300" dirty="0"/>
-          </a:p>
-        </p:txBody>
-      </p:sp>
-      <p:sp>
-        <p:nvSpPr>
-          <p:cNvPr id="21" name="Shape 19"/>
-          <p:cNvSpPr/>
-          <p:nvPr/>
-        </p:nvSpPr>
-        <p:spPr>
-          <a:xfrm>
-            <a:off x="3108960" y="3557016"/>
-            <a:ext cx="8138160" cy="713232"/>
-          </a:xfrm>
-          <a:prstGeom prst="rect">
-            <a:avLst/>
-          </a:prstGeom>
-          <a:solidFill>
-            <a:srgbClr val="FFFFFF"/>
-          </a:solidFill>
-          <a:ln w="8890">
-            <a:solidFill>
-              <a:srgbClr val="E5E7EB"/>
-            </a:solidFill>
-            <a:prstDash val="solid"/>
-          </a:ln>
-        </p:spPr>
-        <p:txBody>
-          <a:bodyPr/>
-          <a:lstStyle/>
-          <a:p>
-            <a:endParaRPr lang="en-US"/>
-          </a:p>
-        </p:txBody>
-      </p:sp>
-      <p:sp>
-        <p:nvSpPr>
-          <p:cNvPr id="22" name="Text 20"/>
-          <p:cNvSpPr/>
-          <p:nvPr/>
-        </p:nvSpPr>
-        <p:spPr>
-          <a:xfrm>
-            <a:off x="3163824" y="3630168"/>
-            <a:ext cx="8028432" cy="603504"/>
-          </a:xfrm>
-          <a:prstGeom prst="rect">
-            <a:avLst/>
-          </a:prstGeom>
-          <a:noFill/>
-          <a:ln/>
-        </p:spPr>
-        <p:txBody>
-          <a:bodyPr wrap="square" lIns="254" tIns="254" rIns="254" bIns="254" rtlCol="0" anchor="ctr">
-            <a:normAutofit/>
-          </a:bodyPr>
-          <a:lstStyle/>
-          <a:p>
-            <a:pPr marL="0" indent="0">
-              <a:buNone/>
-            </a:pPr>
-            <a:r>
-              <a:rPr lang="en-US" sz="1300" dirty="0">
-                <a:solidFill>
-                  <a:srgbClr val="1F2933"/>
-                </a:solidFill>
-              </a:rPr>
-              <a:t>Evaluate precision–recall tradeoffs across probability thresholds.</a:t>
-            </a:r>
-            <a:endParaRPr lang="en-US" sz="1300" dirty="0"/>
-          </a:p>
-        </p:txBody>
-      </p:sp>
-      <p:sp>
-        <p:nvSpPr>
-          <p:cNvPr id="23" name="Shape 21"/>
-          <p:cNvSpPr/>
-          <p:nvPr/>
-        </p:nvSpPr>
-        <p:spPr>
-          <a:xfrm>
-            <a:off x="685800" y="4270248"/>
-            <a:ext cx="2423160" cy="713232"/>
-          </a:xfrm>
-          <a:prstGeom prst="rect">
-            <a:avLst/>
-          </a:prstGeom>
-          <a:solidFill>
-            <a:srgbClr val="F8FAFC"/>
-          </a:solidFill>
-          <a:ln w="8890">
-            <a:solidFill>
-              <a:srgbClr val="E5E7EB"/>
-            </a:solidFill>
-            <a:prstDash val="solid"/>
-          </a:ln>
-        </p:spPr>
-        <p:txBody>
-          <a:bodyPr/>
-          <a:lstStyle/>
-          <a:p>
-            <a:endParaRPr lang="en-US"/>
-          </a:p>
-        </p:txBody>
-      </p:sp>
-      <p:sp>
-        <p:nvSpPr>
-          <p:cNvPr id="24" name="Text 22"/>
-          <p:cNvSpPr/>
-          <p:nvPr/>
-        </p:nvSpPr>
-        <p:spPr>
-          <a:xfrm>
-            <a:off x="740664" y="4343400"/>
-            <a:ext cx="2313432" cy="603504"/>
-          </a:xfrm>
-          <a:prstGeom prst="rect">
-            <a:avLst/>
-          </a:prstGeom>
-          <a:noFill/>
-          <a:ln/>
-        </p:spPr>
-        <p:txBody>
-          <a:bodyPr wrap="square" lIns="254" tIns="254" rIns="254" bIns="254" rtlCol="0" anchor="ctr">
-            <a:normAutofit/>
-          </a:bodyPr>
-          <a:lstStyle/>
-          <a:p>
-            <a:pPr marL="0" indent="0">
-              <a:buNone/>
-            </a:pPr>
-            <a:r>
-              <a:rPr lang="en-US" sz="1300" b="1" dirty="0">
-                <a:solidFill>
-                  <a:srgbClr val="1F2933"/>
-                </a:solidFill>
-              </a:rPr>
-              <a:t>Unsupported statement</a:t>
-            </a:r>
-            <a:endParaRPr lang="en-US" sz="1300" dirty="0"/>
-          </a:p>
-        </p:txBody>
-      </p:sp>
-      <p:sp>
-        <p:nvSpPr>
-          <p:cNvPr id="25" name="Shape 23"/>
-          <p:cNvSpPr/>
-          <p:nvPr/>
-        </p:nvSpPr>
-        <p:spPr>
-          <a:xfrm>
-            <a:off x="3108960" y="4270248"/>
-            <a:ext cx="8138160" cy="713232"/>
-          </a:xfrm>
-          <a:prstGeom prst="rect">
-            <a:avLst/>
-          </a:prstGeom>
-          <a:solidFill>
-            <a:srgbClr val="F8FAFC"/>
-          </a:solidFill>
-          <a:ln w="8890">
-            <a:solidFill>
-              <a:srgbClr val="E5E7EB"/>
-            </a:solidFill>
-            <a:prstDash val="solid"/>
-          </a:ln>
-        </p:spPr>
-        <p:txBody>
-          <a:bodyPr/>
-          <a:lstStyle/>
-          <a:p>
-            <a:endParaRPr lang="en-US"/>
-          </a:p>
-        </p:txBody>
-      </p:sp>
-      <p:sp>
-        <p:nvSpPr>
-          <p:cNvPr id="26" name="Text 24"/>
-          <p:cNvSpPr/>
-          <p:nvPr/>
-        </p:nvSpPr>
-        <p:spPr>
-          <a:xfrm>
-            <a:off x="3163824" y="4343400"/>
-            <a:ext cx="8028432" cy="603504"/>
-          </a:xfrm>
-          <a:prstGeom prst="rect">
-            <a:avLst/>
-          </a:prstGeom>
-          <a:noFill/>
-          <a:ln/>
-        </p:spPr>
-        <p:txBody>
-          <a:bodyPr wrap="square" lIns="254" tIns="254" rIns="254" bIns="254" rtlCol="0" anchor="ctr">
-            <a:normAutofit/>
-          </a:bodyPr>
-          <a:lstStyle/>
-          <a:p>
-            <a:pPr marL="0" indent="0">
-              <a:buNone/>
-            </a:pPr>
-            <a:r>
-              <a:rPr lang="en-US" sz="1300" dirty="0">
-                <a:solidFill>
-                  <a:srgbClr val="1F2933"/>
-                </a:solidFill>
-              </a:rPr>
-              <a:t>Do not claim that measured variables cause defects.</a:t>
-            </a:r>
-            <a:endParaRPr lang="en-US" sz="1300" dirty="0"/>
-          </a:p>
-        </p:txBody>
-      </p:sp>
-      <p:sp>
-        <p:nvSpPr>
-          <p:cNvPr id="27" name="Shape 25"/>
-          <p:cNvSpPr/>
-          <p:nvPr/>
-        </p:nvSpPr>
-        <p:spPr>
-          <a:xfrm>
-            <a:off x="822960" y="5166360"/>
-            <a:ext cx="9966960" cy="658368"/>
-          </a:xfrm>
-          <a:prstGeom prst="roundRect">
-            <a:avLst>
-              <a:gd name="adj" fmla="val 11111"/>
-            </a:avLst>
-          </a:prstGeom>
-          <a:solidFill>
-            <a:srgbClr val="FDEAEA"/>
-          </a:solidFill>
-          <a:ln w="12700">
-            <a:solidFill>
-              <a:srgbClr val="CC0000"/>
-            </a:solidFill>
-            <a:prstDash val="solid"/>
-          </a:ln>
-        </p:spPr>
-        <p:txBody>
-          <a:bodyPr/>
-          <a:lstStyle/>
-          <a:p>
-            <a:endParaRPr lang="en-US"/>
-          </a:p>
-        </p:txBody>
-      </p:sp>
-      <p:sp>
-        <p:nvSpPr>
-          <p:cNvPr id="28" name="Text 26"/>
-          <p:cNvSpPr/>
-          <p:nvPr/>
-        </p:nvSpPr>
-        <p:spPr>
-          <a:xfrm>
-            <a:off x="1051560" y="5404104"/>
-            <a:ext cx="9509760" cy="201168"/>
-          </a:xfrm>
-          <a:prstGeom prst="rect">
-            <a:avLst/>
-          </a:prstGeom>
-          <a:noFill/>
-          <a:ln/>
-        </p:spPr>
-        <p:txBody>
-          <a:bodyPr wrap="square" lIns="0" tIns="0" rIns="0" bIns="0" rtlCol="0" anchor="ctr"/>
-          <a:lstStyle/>
-          <a:p>
-            <a:pPr marL="0" indent="0" algn="ctr">
-              <a:buNone/>
-            </a:pPr>
-            <a:r>
-              <a:rPr lang="en-US" sz="1700" b="1" dirty="0">
-                <a:solidFill>
-                  <a:srgbClr val="1F2933"/>
-                </a:solidFill>
-              </a:rPr>
-              <a:t>The AI explanation should organize evidence — not create new evidence.</a:t>
-            </a:r>
-            <a:endParaRPr lang="en-US" sz="1700" dirty="0"/>
-          </a:p>
-        </p:txBody>
-      </p:sp>
+            <a:r>
+              <a:rPr lang="en-US" dirty="0"/>
+              <a:t>https://gemini.google.com/</a:t>
+            </a:r>
+          </a:p>
+        </p:txBody>
+      </p:sp>
+      <p:pic>
+        <p:nvPicPr>
+          <p:cNvPr id="13" name="Picture 12">
+            <a:extLst>
+              <a:ext uri="{FF2B5EF4-FFF2-40B4-BE49-F238E27FC236}">
+                <a16:creationId xmlns:a16="http://schemas.microsoft.com/office/drawing/2014/main" id="{C2A90C9E-1FE7-D7CC-E5FD-37F84FB9D0FE}"/>
+              </a:ext>
+            </a:extLst>
+          </p:cNvPr>
+          <p:cNvPicPr>
+            <a:picLocks noChangeAspect="1"/>
+          </p:cNvPicPr>
+          <p:nvPr/>
+        </p:nvPicPr>
+        <p:blipFill>
+          <a:blip r:embed="rId3"/>
+          <a:stretch>
+            <a:fillRect/>
+          </a:stretch>
+        </p:blipFill>
+        <p:spPr>
+          <a:xfrm>
+            <a:off x="2100580" y="1794256"/>
+            <a:ext cx="7274560" cy="3625818"/>
+          </a:xfrm>
+          <a:prstGeom prst="rect">
+            <a:avLst/>
+          </a:prstGeom>
+        </p:spPr>
+      </p:pic>
     </p:spTree>
+    <p:extLst>
+      <p:ext uri="{BB962C8B-B14F-4D97-AF65-F5344CB8AC3E}">
+        <p14:creationId xmlns:p14="http://schemas.microsoft.com/office/powerpoint/2010/main" val="1712228531"/>
+      </p:ext>
+    </p:extLst>
   </p:cSld>
   <p:clrMapOvr>
     <a:masterClrMapping/>
@@ -6205,6 +5821,986 @@
       </p:grpSpPr>
       <p:sp>
         <p:nvSpPr>
+          <p:cNvPr id="2" name="Text 0"/>
+          <p:cNvSpPr/>
+          <p:nvPr/>
+        </p:nvSpPr>
+        <p:spPr>
+          <a:xfrm>
+            <a:off x="502920" y="201168"/>
+            <a:ext cx="4572000" cy="228600"/>
+          </a:xfrm>
+          <a:prstGeom prst="rect">
+            <a:avLst/>
+          </a:prstGeom>
+          <a:noFill/>
+          <a:ln/>
+        </p:spPr>
+        <p:txBody>
+          <a:bodyPr wrap="square" lIns="0" tIns="0" rIns="0" bIns="0" rtlCol="0" anchor="ctr"/>
+          <a:lstStyle/>
+          <a:p>
+            <a:pPr marL="0" indent="0">
+              <a:buNone/>
+            </a:pPr>
+            <a:r>
+              <a:rPr lang="en-US" sz="1000" b="1" dirty="0">
+                <a:solidFill>
+                  <a:srgbClr val="CC0000"/>
+                </a:solidFill>
+                <a:latin typeface="Aptos" pitchFamily="34" charset="0"/>
+                <a:ea typeface="Aptos" pitchFamily="34" charset="-122"/>
+                <a:cs typeface="Aptos" pitchFamily="34" charset="-120"/>
+              </a:rPr>
+              <a:t>APPLIED AI DESIGN WORKSHOP</a:t>
+            </a:r>
+            <a:endParaRPr lang="en-US" sz="1000" dirty="0"/>
+          </a:p>
+        </p:txBody>
+      </p:sp>
+      <p:sp>
+        <p:nvSpPr>
+          <p:cNvPr id="3" name="Text 1"/>
+          <p:cNvSpPr/>
+          <p:nvPr/>
+        </p:nvSpPr>
+        <p:spPr>
+          <a:xfrm>
+            <a:off x="9509760" y="201168"/>
+            <a:ext cx="1783080" cy="228600"/>
+          </a:xfrm>
+          <a:prstGeom prst="rect">
+            <a:avLst/>
+          </a:prstGeom>
+          <a:noFill/>
+          <a:ln/>
+        </p:spPr>
+        <p:txBody>
+          <a:bodyPr wrap="square" lIns="0" tIns="0" rIns="0" bIns="0" rtlCol="0" anchor="ctr"/>
+          <a:lstStyle/>
+          <a:p>
+            <a:pPr marL="0" indent="0" algn="r">
+              <a:buNone/>
+            </a:pPr>
+            <a:r>
+              <a:rPr lang="en-US" sz="1000" b="1" dirty="0">
+                <a:solidFill>
+                  <a:srgbClr val="4B5563"/>
+                </a:solidFill>
+                <a:latin typeface="Aptos" pitchFamily="34" charset="0"/>
+                <a:ea typeface="Aptos" pitchFamily="34" charset="-122"/>
+                <a:cs typeface="Aptos" pitchFamily="34" charset="-120"/>
+              </a:rPr>
+              <a:t>Session 1</a:t>
+            </a:r>
+            <a:endParaRPr lang="en-US" sz="1000" dirty="0"/>
+          </a:p>
+        </p:txBody>
+      </p:sp>
+      <p:sp>
+        <p:nvSpPr>
+          <p:cNvPr id="4" name="Shape 2"/>
+          <p:cNvSpPr/>
+          <p:nvPr/>
+        </p:nvSpPr>
+        <p:spPr>
+          <a:xfrm>
+            <a:off x="502920" y="502920"/>
+            <a:ext cx="10469880" cy="0"/>
+          </a:xfrm>
+          <a:prstGeom prst="line">
+            <a:avLst/>
+          </a:prstGeom>
+          <a:noFill/>
+          <a:ln w="12700">
+            <a:solidFill>
+              <a:srgbClr val="E5E7EB"/>
+            </a:solidFill>
+            <a:prstDash val="solid"/>
+          </a:ln>
+        </p:spPr>
+        <p:txBody>
+          <a:bodyPr/>
+          <a:lstStyle/>
+          <a:p>
+            <a:endParaRPr lang="en-US"/>
+          </a:p>
+        </p:txBody>
+      </p:sp>
+      <p:sp>
+        <p:nvSpPr>
+          <p:cNvPr id="5" name="Text 3"/>
+          <p:cNvSpPr/>
+          <p:nvPr/>
+        </p:nvSpPr>
+        <p:spPr>
+          <a:xfrm>
+            <a:off x="594360" y="713232"/>
+            <a:ext cx="10104120" cy="438912"/>
+          </a:xfrm>
+          <a:prstGeom prst="rect">
+            <a:avLst/>
+          </a:prstGeom>
+          <a:noFill/>
+          <a:ln/>
+        </p:spPr>
+        <p:txBody>
+          <a:bodyPr wrap="square" lIns="0" tIns="0" rIns="0" bIns="0" rtlCol="0" anchor="ctr">
+            <a:normAutofit/>
+          </a:bodyPr>
+          <a:lstStyle/>
+          <a:p>
+            <a:pPr marL="0" indent="0">
+              <a:buNone/>
+            </a:pPr>
+            <a:r>
+              <a:rPr lang="en-US" sz="2400" b="1" dirty="0">
+                <a:solidFill>
+                  <a:srgbClr val="1F2933"/>
+                </a:solidFill>
+                <a:latin typeface="Aptos Display" pitchFamily="34" charset="0"/>
+                <a:ea typeface="Aptos Display" pitchFamily="34" charset="-122"/>
+                <a:cs typeface="Aptos Display" pitchFamily="34" charset="-120"/>
+              </a:rPr>
+              <a:t>Grounded Response Structure</a:t>
+            </a:r>
+            <a:endParaRPr lang="en-US" sz="2400" dirty="0"/>
+          </a:p>
+        </p:txBody>
+      </p:sp>
+      <p:sp>
+        <p:nvSpPr>
+          <p:cNvPr id="6" name="Text 4"/>
+          <p:cNvSpPr/>
+          <p:nvPr/>
+        </p:nvSpPr>
+        <p:spPr>
+          <a:xfrm>
+            <a:off x="10716768" y="6199632"/>
+            <a:ext cx="274320" cy="137160"/>
+          </a:xfrm>
+          <a:prstGeom prst="rect">
+            <a:avLst/>
+          </a:prstGeom>
+          <a:noFill/>
+          <a:ln/>
+        </p:spPr>
+        <p:txBody>
+          <a:bodyPr wrap="square" lIns="0" tIns="0" rIns="0" bIns="0" rtlCol="0" anchor="ctr"/>
+          <a:lstStyle/>
+          <a:p>
+            <a:pPr marL="0" indent="0" algn="r">
+              <a:buNone/>
+            </a:pPr>
+            <a:r>
+              <a:rPr lang="en-US" sz="800" dirty="0">
+                <a:solidFill>
+                  <a:srgbClr val="4B5563"/>
+                </a:solidFill>
+              </a:rPr>
+              <a:t>12</a:t>
+            </a:r>
+            <a:endParaRPr lang="en-US" sz="800" dirty="0"/>
+          </a:p>
+        </p:txBody>
+      </p:sp>
+      <p:sp>
+        <p:nvSpPr>
+          <p:cNvPr id="7" name="Shape 5"/>
+          <p:cNvSpPr/>
+          <p:nvPr/>
+        </p:nvSpPr>
+        <p:spPr>
+          <a:xfrm>
+            <a:off x="685800" y="1417320"/>
+            <a:ext cx="2423160" cy="713232"/>
+          </a:xfrm>
+          <a:prstGeom prst="rect">
+            <a:avLst/>
+          </a:prstGeom>
+          <a:solidFill>
+            <a:srgbClr val="FDEAEA"/>
+          </a:solidFill>
+          <a:ln w="8890">
+            <a:solidFill>
+              <a:srgbClr val="E5E7EB"/>
+            </a:solidFill>
+            <a:prstDash val="solid"/>
+          </a:ln>
+        </p:spPr>
+        <p:txBody>
+          <a:bodyPr/>
+          <a:lstStyle/>
+          <a:p>
+            <a:endParaRPr lang="en-US"/>
+          </a:p>
+        </p:txBody>
+      </p:sp>
+      <p:sp>
+        <p:nvSpPr>
+          <p:cNvPr id="8" name="Text 6"/>
+          <p:cNvSpPr/>
+          <p:nvPr/>
+        </p:nvSpPr>
+        <p:spPr>
+          <a:xfrm>
+            <a:off x="740664" y="1490472"/>
+            <a:ext cx="2313432" cy="603504"/>
+          </a:xfrm>
+          <a:prstGeom prst="rect">
+            <a:avLst/>
+          </a:prstGeom>
+          <a:noFill/>
+          <a:ln/>
+        </p:spPr>
+        <p:txBody>
+          <a:bodyPr wrap="square" lIns="254" tIns="254" rIns="254" bIns="254" rtlCol="0" anchor="ctr">
+            <a:normAutofit/>
+          </a:bodyPr>
+          <a:lstStyle/>
+          <a:p>
+            <a:pPr marL="0" indent="0">
+              <a:buNone/>
+            </a:pPr>
+            <a:r>
+              <a:rPr lang="en-US" sz="1300" b="1" dirty="0">
+                <a:solidFill>
+                  <a:srgbClr val="CC0000"/>
+                </a:solidFill>
+              </a:rPr>
+              <a:t>Section</a:t>
+            </a:r>
+            <a:endParaRPr lang="en-US" sz="1300" dirty="0"/>
+          </a:p>
+        </p:txBody>
+      </p:sp>
+      <p:sp>
+        <p:nvSpPr>
+          <p:cNvPr id="9" name="Shape 7"/>
+          <p:cNvSpPr/>
+          <p:nvPr/>
+        </p:nvSpPr>
+        <p:spPr>
+          <a:xfrm>
+            <a:off x="3108960" y="1417320"/>
+            <a:ext cx="8138160" cy="713232"/>
+          </a:xfrm>
+          <a:prstGeom prst="rect">
+            <a:avLst/>
+          </a:prstGeom>
+          <a:solidFill>
+            <a:srgbClr val="FDEAEA"/>
+          </a:solidFill>
+          <a:ln w="8890">
+            <a:solidFill>
+              <a:srgbClr val="E5E7EB"/>
+            </a:solidFill>
+            <a:prstDash val="solid"/>
+          </a:ln>
+        </p:spPr>
+        <p:txBody>
+          <a:bodyPr/>
+          <a:lstStyle/>
+          <a:p>
+            <a:endParaRPr lang="en-US"/>
+          </a:p>
+        </p:txBody>
+      </p:sp>
+      <p:sp>
+        <p:nvSpPr>
+          <p:cNvPr id="10" name="Text 8"/>
+          <p:cNvSpPr/>
+          <p:nvPr/>
+        </p:nvSpPr>
+        <p:spPr>
+          <a:xfrm>
+            <a:off x="3163824" y="1490472"/>
+            <a:ext cx="8028432" cy="603504"/>
+          </a:xfrm>
+          <a:prstGeom prst="rect">
+            <a:avLst/>
+          </a:prstGeom>
+          <a:noFill/>
+          <a:ln/>
+        </p:spPr>
+        <p:txBody>
+          <a:bodyPr wrap="square" lIns="254" tIns="254" rIns="254" bIns="254" rtlCol="0" anchor="ctr">
+            <a:normAutofit/>
+          </a:bodyPr>
+          <a:lstStyle/>
+          <a:p>
+            <a:pPr marL="0" indent="0">
+              <a:buNone/>
+            </a:pPr>
+            <a:r>
+              <a:rPr lang="en-US" sz="1300" b="1" dirty="0">
+                <a:solidFill>
+                  <a:srgbClr val="CC0000"/>
+                </a:solidFill>
+              </a:rPr>
+              <a:t>Content</a:t>
+            </a:r>
+            <a:endParaRPr lang="en-US" sz="1300" dirty="0"/>
+          </a:p>
+        </p:txBody>
+      </p:sp>
+      <p:sp>
+        <p:nvSpPr>
+          <p:cNvPr id="11" name="Shape 9"/>
+          <p:cNvSpPr/>
+          <p:nvPr/>
+        </p:nvSpPr>
+        <p:spPr>
+          <a:xfrm>
+            <a:off x="685800" y="2130552"/>
+            <a:ext cx="2423160" cy="713232"/>
+          </a:xfrm>
+          <a:prstGeom prst="rect">
+            <a:avLst/>
+          </a:prstGeom>
+          <a:solidFill>
+            <a:srgbClr val="FFFFFF"/>
+          </a:solidFill>
+          <a:ln w="8890">
+            <a:solidFill>
+              <a:srgbClr val="E5E7EB"/>
+            </a:solidFill>
+            <a:prstDash val="solid"/>
+          </a:ln>
+        </p:spPr>
+        <p:txBody>
+          <a:bodyPr/>
+          <a:lstStyle/>
+          <a:p>
+            <a:endParaRPr lang="en-US"/>
+          </a:p>
+        </p:txBody>
+      </p:sp>
+      <p:sp>
+        <p:nvSpPr>
+          <p:cNvPr id="12" name="Text 10"/>
+          <p:cNvSpPr/>
+          <p:nvPr/>
+        </p:nvSpPr>
+        <p:spPr>
+          <a:xfrm>
+            <a:off x="740664" y="2203704"/>
+            <a:ext cx="2313432" cy="603504"/>
+          </a:xfrm>
+          <a:prstGeom prst="rect">
+            <a:avLst/>
+          </a:prstGeom>
+          <a:noFill/>
+          <a:ln/>
+        </p:spPr>
+        <p:txBody>
+          <a:bodyPr wrap="square" lIns="254" tIns="254" rIns="254" bIns="254" rtlCol="0" anchor="ctr">
+            <a:normAutofit/>
+          </a:bodyPr>
+          <a:lstStyle/>
+          <a:p>
+            <a:pPr marL="0" indent="0">
+              <a:buNone/>
+            </a:pPr>
+            <a:r>
+              <a:rPr lang="en-US" sz="1300" b="1" dirty="0">
+                <a:solidFill>
+                  <a:srgbClr val="1F2933"/>
+                </a:solidFill>
+              </a:rPr>
+              <a:t>Technical interpretation</a:t>
+            </a:r>
+            <a:endParaRPr lang="en-US" sz="1300" dirty="0"/>
+          </a:p>
+        </p:txBody>
+      </p:sp>
+      <p:sp>
+        <p:nvSpPr>
+          <p:cNvPr id="13" name="Shape 11"/>
+          <p:cNvSpPr/>
+          <p:nvPr/>
+        </p:nvSpPr>
+        <p:spPr>
+          <a:xfrm>
+            <a:off x="3108960" y="2130552"/>
+            <a:ext cx="8138160" cy="713232"/>
+          </a:xfrm>
+          <a:prstGeom prst="rect">
+            <a:avLst/>
+          </a:prstGeom>
+          <a:solidFill>
+            <a:srgbClr val="FFFFFF"/>
+          </a:solidFill>
+          <a:ln w="8890">
+            <a:solidFill>
+              <a:srgbClr val="E5E7EB"/>
+            </a:solidFill>
+            <a:prstDash val="solid"/>
+          </a:ln>
+        </p:spPr>
+        <p:txBody>
+          <a:bodyPr/>
+          <a:lstStyle/>
+          <a:p>
+            <a:endParaRPr lang="en-US"/>
+          </a:p>
+        </p:txBody>
+      </p:sp>
+      <p:sp>
+        <p:nvSpPr>
+          <p:cNvPr id="14" name="Text 12"/>
+          <p:cNvSpPr/>
+          <p:nvPr/>
+        </p:nvSpPr>
+        <p:spPr>
+          <a:xfrm>
+            <a:off x="3163824" y="2203704"/>
+            <a:ext cx="8028432" cy="603504"/>
+          </a:xfrm>
+          <a:prstGeom prst="rect">
+            <a:avLst/>
+          </a:prstGeom>
+          <a:noFill/>
+          <a:ln/>
+        </p:spPr>
+        <p:txBody>
+          <a:bodyPr wrap="square" lIns="254" tIns="254" rIns="254" bIns="254" rtlCol="0" anchor="ctr">
+            <a:normAutofit/>
+          </a:bodyPr>
+          <a:lstStyle/>
+          <a:p>
+            <a:pPr marL="0" indent="0">
+              <a:buNone/>
+            </a:pPr>
+            <a:r>
+              <a:rPr lang="en-US" sz="1300" dirty="0">
+                <a:solidFill>
+                  <a:srgbClr val="1F2933"/>
+                </a:solidFill>
+              </a:rPr>
+              <a:t>Model improves accuracy but has low defect recall; screening value is limited.</a:t>
+            </a:r>
+            <a:endParaRPr lang="en-US" sz="1300" dirty="0"/>
+          </a:p>
+        </p:txBody>
+      </p:sp>
+      <p:sp>
+        <p:nvSpPr>
+          <p:cNvPr id="15" name="Shape 13"/>
+          <p:cNvSpPr/>
+          <p:nvPr/>
+        </p:nvSpPr>
+        <p:spPr>
+          <a:xfrm>
+            <a:off x="685800" y="2843784"/>
+            <a:ext cx="2423160" cy="713232"/>
+          </a:xfrm>
+          <a:prstGeom prst="rect">
+            <a:avLst/>
+          </a:prstGeom>
+          <a:solidFill>
+            <a:srgbClr val="F8FAFC"/>
+          </a:solidFill>
+          <a:ln w="8890">
+            <a:solidFill>
+              <a:srgbClr val="E5E7EB"/>
+            </a:solidFill>
+            <a:prstDash val="solid"/>
+          </a:ln>
+        </p:spPr>
+        <p:txBody>
+          <a:bodyPr/>
+          <a:lstStyle/>
+          <a:p>
+            <a:endParaRPr lang="en-US"/>
+          </a:p>
+        </p:txBody>
+      </p:sp>
+      <p:sp>
+        <p:nvSpPr>
+          <p:cNvPr id="16" name="Text 14"/>
+          <p:cNvSpPr/>
+          <p:nvPr/>
+        </p:nvSpPr>
+        <p:spPr>
+          <a:xfrm>
+            <a:off x="740664" y="2916936"/>
+            <a:ext cx="2313432" cy="603504"/>
+          </a:xfrm>
+          <a:prstGeom prst="rect">
+            <a:avLst/>
+          </a:prstGeom>
+          <a:noFill/>
+          <a:ln/>
+        </p:spPr>
+        <p:txBody>
+          <a:bodyPr wrap="square" lIns="254" tIns="254" rIns="254" bIns="254" rtlCol="0" anchor="ctr">
+            <a:normAutofit/>
+          </a:bodyPr>
+          <a:lstStyle/>
+          <a:p>
+            <a:pPr marL="0" indent="0">
+              <a:buNone/>
+            </a:pPr>
+            <a:r>
+              <a:rPr lang="en-US" sz="1300" b="1" dirty="0">
+                <a:solidFill>
+                  <a:srgbClr val="1F2933"/>
+                </a:solidFill>
+              </a:rPr>
+              <a:t>Manager summary</a:t>
+            </a:r>
+            <a:endParaRPr lang="en-US" sz="1300" dirty="0"/>
+          </a:p>
+        </p:txBody>
+      </p:sp>
+      <p:sp>
+        <p:nvSpPr>
+          <p:cNvPr id="17" name="Shape 15"/>
+          <p:cNvSpPr/>
+          <p:nvPr/>
+        </p:nvSpPr>
+        <p:spPr>
+          <a:xfrm>
+            <a:off x="3108960" y="2843784"/>
+            <a:ext cx="8138160" cy="713232"/>
+          </a:xfrm>
+          <a:prstGeom prst="rect">
+            <a:avLst/>
+          </a:prstGeom>
+          <a:solidFill>
+            <a:srgbClr val="F8FAFC"/>
+          </a:solidFill>
+          <a:ln w="8890">
+            <a:solidFill>
+              <a:srgbClr val="E5E7EB"/>
+            </a:solidFill>
+            <a:prstDash val="solid"/>
+          </a:ln>
+        </p:spPr>
+        <p:txBody>
+          <a:bodyPr/>
+          <a:lstStyle/>
+          <a:p>
+            <a:endParaRPr lang="en-US"/>
+          </a:p>
+        </p:txBody>
+      </p:sp>
+      <p:sp>
+        <p:nvSpPr>
+          <p:cNvPr id="18" name="Text 16"/>
+          <p:cNvSpPr/>
+          <p:nvPr/>
+        </p:nvSpPr>
+        <p:spPr>
+          <a:xfrm>
+            <a:off x="3163824" y="2916936"/>
+            <a:ext cx="8028432" cy="603504"/>
+          </a:xfrm>
+          <a:prstGeom prst="rect">
+            <a:avLst/>
+          </a:prstGeom>
+          <a:noFill/>
+          <a:ln/>
+        </p:spPr>
+        <p:txBody>
+          <a:bodyPr wrap="square" lIns="254" tIns="254" rIns="254" bIns="254" rtlCol="0" anchor="ctr">
+            <a:normAutofit/>
+          </a:bodyPr>
+          <a:lstStyle/>
+          <a:p>
+            <a:pPr marL="0" indent="0">
+              <a:buNone/>
+            </a:pPr>
+            <a:r>
+              <a:rPr lang="en-US" sz="1300" dirty="0">
+                <a:solidFill>
+                  <a:srgbClr val="1F2933"/>
+                </a:solidFill>
+              </a:rPr>
+              <a:t>Few false alarms, but only about one-quarter of defects detected. Do not replace inspection.</a:t>
+            </a:r>
+            <a:endParaRPr lang="en-US" sz="1300" dirty="0"/>
+          </a:p>
+        </p:txBody>
+      </p:sp>
+      <p:sp>
+        <p:nvSpPr>
+          <p:cNvPr id="19" name="Shape 17"/>
+          <p:cNvSpPr/>
+          <p:nvPr/>
+        </p:nvSpPr>
+        <p:spPr>
+          <a:xfrm>
+            <a:off x="685800" y="3557016"/>
+            <a:ext cx="2423160" cy="713232"/>
+          </a:xfrm>
+          <a:prstGeom prst="rect">
+            <a:avLst/>
+          </a:prstGeom>
+          <a:solidFill>
+            <a:srgbClr val="FFFFFF"/>
+          </a:solidFill>
+          <a:ln w="8890">
+            <a:solidFill>
+              <a:srgbClr val="E5E7EB"/>
+            </a:solidFill>
+            <a:prstDash val="solid"/>
+          </a:ln>
+        </p:spPr>
+        <p:txBody>
+          <a:bodyPr/>
+          <a:lstStyle/>
+          <a:p>
+            <a:endParaRPr lang="en-US"/>
+          </a:p>
+        </p:txBody>
+      </p:sp>
+      <p:sp>
+        <p:nvSpPr>
+          <p:cNvPr id="20" name="Text 18"/>
+          <p:cNvSpPr/>
+          <p:nvPr/>
+        </p:nvSpPr>
+        <p:spPr>
+          <a:xfrm>
+            <a:off x="740664" y="3630168"/>
+            <a:ext cx="2313432" cy="603504"/>
+          </a:xfrm>
+          <a:prstGeom prst="rect">
+            <a:avLst/>
+          </a:prstGeom>
+          <a:noFill/>
+          <a:ln/>
+        </p:spPr>
+        <p:txBody>
+          <a:bodyPr wrap="square" lIns="254" tIns="254" rIns="254" bIns="254" rtlCol="0" anchor="ctr">
+            <a:normAutofit/>
+          </a:bodyPr>
+          <a:lstStyle/>
+          <a:p>
+            <a:pPr marL="0" indent="0">
+              <a:buNone/>
+            </a:pPr>
+            <a:r>
+              <a:rPr lang="en-US" sz="1300" b="1" dirty="0">
+                <a:solidFill>
+                  <a:srgbClr val="1F2933"/>
+                </a:solidFill>
+              </a:rPr>
+              <a:t>Recommended next analysis</a:t>
+            </a:r>
+            <a:endParaRPr lang="en-US" sz="1300" dirty="0"/>
+          </a:p>
+        </p:txBody>
+      </p:sp>
+      <p:sp>
+        <p:nvSpPr>
+          <p:cNvPr id="21" name="Shape 19"/>
+          <p:cNvSpPr/>
+          <p:nvPr/>
+        </p:nvSpPr>
+        <p:spPr>
+          <a:xfrm>
+            <a:off x="3108960" y="3557016"/>
+            <a:ext cx="8138160" cy="713232"/>
+          </a:xfrm>
+          <a:prstGeom prst="rect">
+            <a:avLst/>
+          </a:prstGeom>
+          <a:solidFill>
+            <a:srgbClr val="FFFFFF"/>
+          </a:solidFill>
+          <a:ln w="8890">
+            <a:solidFill>
+              <a:srgbClr val="E5E7EB"/>
+            </a:solidFill>
+            <a:prstDash val="solid"/>
+          </a:ln>
+        </p:spPr>
+        <p:txBody>
+          <a:bodyPr/>
+          <a:lstStyle/>
+          <a:p>
+            <a:endParaRPr lang="en-US"/>
+          </a:p>
+        </p:txBody>
+      </p:sp>
+      <p:sp>
+        <p:nvSpPr>
+          <p:cNvPr id="22" name="Text 20"/>
+          <p:cNvSpPr/>
+          <p:nvPr/>
+        </p:nvSpPr>
+        <p:spPr>
+          <a:xfrm>
+            <a:off x="3163824" y="3630168"/>
+            <a:ext cx="8028432" cy="603504"/>
+          </a:xfrm>
+          <a:prstGeom prst="rect">
+            <a:avLst/>
+          </a:prstGeom>
+          <a:noFill/>
+          <a:ln/>
+        </p:spPr>
+        <p:txBody>
+          <a:bodyPr wrap="square" lIns="254" tIns="254" rIns="254" bIns="254" rtlCol="0" anchor="ctr">
+            <a:normAutofit/>
+          </a:bodyPr>
+          <a:lstStyle/>
+          <a:p>
+            <a:pPr marL="0" indent="0">
+              <a:buNone/>
+            </a:pPr>
+            <a:r>
+              <a:rPr lang="en-US" sz="1300" dirty="0">
+                <a:solidFill>
+                  <a:srgbClr val="1F2933"/>
+                </a:solidFill>
+              </a:rPr>
+              <a:t>Evaluate precision–recall tradeoffs across probability thresholds.</a:t>
+            </a:r>
+            <a:endParaRPr lang="en-US" sz="1300" dirty="0"/>
+          </a:p>
+        </p:txBody>
+      </p:sp>
+      <p:sp>
+        <p:nvSpPr>
+          <p:cNvPr id="23" name="Shape 21"/>
+          <p:cNvSpPr/>
+          <p:nvPr/>
+        </p:nvSpPr>
+        <p:spPr>
+          <a:xfrm>
+            <a:off x="685800" y="4270248"/>
+            <a:ext cx="2423160" cy="713232"/>
+          </a:xfrm>
+          <a:prstGeom prst="rect">
+            <a:avLst/>
+          </a:prstGeom>
+          <a:solidFill>
+            <a:srgbClr val="F8FAFC"/>
+          </a:solidFill>
+          <a:ln w="8890">
+            <a:solidFill>
+              <a:srgbClr val="E5E7EB"/>
+            </a:solidFill>
+            <a:prstDash val="solid"/>
+          </a:ln>
+        </p:spPr>
+        <p:txBody>
+          <a:bodyPr/>
+          <a:lstStyle/>
+          <a:p>
+            <a:endParaRPr lang="en-US"/>
+          </a:p>
+        </p:txBody>
+      </p:sp>
+      <p:sp>
+        <p:nvSpPr>
+          <p:cNvPr id="24" name="Text 22"/>
+          <p:cNvSpPr/>
+          <p:nvPr/>
+        </p:nvSpPr>
+        <p:spPr>
+          <a:xfrm>
+            <a:off x="740664" y="4343400"/>
+            <a:ext cx="2313432" cy="603504"/>
+          </a:xfrm>
+          <a:prstGeom prst="rect">
+            <a:avLst/>
+          </a:prstGeom>
+          <a:noFill/>
+          <a:ln/>
+        </p:spPr>
+        <p:txBody>
+          <a:bodyPr wrap="square" lIns="254" tIns="254" rIns="254" bIns="254" rtlCol="0" anchor="ctr">
+            <a:normAutofit/>
+          </a:bodyPr>
+          <a:lstStyle/>
+          <a:p>
+            <a:pPr marL="0" indent="0">
+              <a:buNone/>
+            </a:pPr>
+            <a:r>
+              <a:rPr lang="en-US" sz="1300" b="1" dirty="0">
+                <a:solidFill>
+                  <a:srgbClr val="1F2933"/>
+                </a:solidFill>
+              </a:rPr>
+              <a:t>Unsupported statement</a:t>
+            </a:r>
+            <a:endParaRPr lang="en-US" sz="1300" dirty="0"/>
+          </a:p>
+        </p:txBody>
+      </p:sp>
+      <p:sp>
+        <p:nvSpPr>
+          <p:cNvPr id="25" name="Shape 23"/>
+          <p:cNvSpPr/>
+          <p:nvPr/>
+        </p:nvSpPr>
+        <p:spPr>
+          <a:xfrm>
+            <a:off x="3108960" y="4270248"/>
+            <a:ext cx="8138160" cy="713232"/>
+          </a:xfrm>
+          <a:prstGeom prst="rect">
+            <a:avLst/>
+          </a:prstGeom>
+          <a:solidFill>
+            <a:srgbClr val="F8FAFC"/>
+          </a:solidFill>
+          <a:ln w="8890">
+            <a:solidFill>
+              <a:srgbClr val="E5E7EB"/>
+            </a:solidFill>
+            <a:prstDash val="solid"/>
+          </a:ln>
+        </p:spPr>
+        <p:txBody>
+          <a:bodyPr/>
+          <a:lstStyle/>
+          <a:p>
+            <a:endParaRPr lang="en-US"/>
+          </a:p>
+        </p:txBody>
+      </p:sp>
+      <p:sp>
+        <p:nvSpPr>
+          <p:cNvPr id="26" name="Text 24"/>
+          <p:cNvSpPr/>
+          <p:nvPr/>
+        </p:nvSpPr>
+        <p:spPr>
+          <a:xfrm>
+            <a:off x="3163824" y="4343400"/>
+            <a:ext cx="8028432" cy="603504"/>
+          </a:xfrm>
+          <a:prstGeom prst="rect">
+            <a:avLst/>
+          </a:prstGeom>
+          <a:noFill/>
+          <a:ln/>
+        </p:spPr>
+        <p:txBody>
+          <a:bodyPr wrap="square" lIns="254" tIns="254" rIns="254" bIns="254" rtlCol="0" anchor="ctr">
+            <a:normAutofit/>
+          </a:bodyPr>
+          <a:lstStyle/>
+          <a:p>
+            <a:pPr marL="0" indent="0">
+              <a:buNone/>
+            </a:pPr>
+            <a:r>
+              <a:rPr lang="en-US" sz="1300" dirty="0">
+                <a:solidFill>
+                  <a:srgbClr val="1F2933"/>
+                </a:solidFill>
+              </a:rPr>
+              <a:t>Do not claim that measured variables cause defects.</a:t>
+            </a:r>
+            <a:endParaRPr lang="en-US" sz="1300" dirty="0"/>
+          </a:p>
+        </p:txBody>
+      </p:sp>
+      <p:sp>
+        <p:nvSpPr>
+          <p:cNvPr id="27" name="Shape 25"/>
+          <p:cNvSpPr/>
+          <p:nvPr/>
+        </p:nvSpPr>
+        <p:spPr>
+          <a:xfrm>
+            <a:off x="822960" y="5166360"/>
+            <a:ext cx="9966960" cy="658368"/>
+          </a:xfrm>
+          <a:prstGeom prst="roundRect">
+            <a:avLst>
+              <a:gd name="adj" fmla="val 11111"/>
+            </a:avLst>
+          </a:prstGeom>
+          <a:solidFill>
+            <a:srgbClr val="FDEAEA"/>
+          </a:solidFill>
+          <a:ln w="12700">
+            <a:solidFill>
+              <a:srgbClr val="CC0000"/>
+            </a:solidFill>
+            <a:prstDash val="solid"/>
+          </a:ln>
+        </p:spPr>
+        <p:txBody>
+          <a:bodyPr/>
+          <a:lstStyle/>
+          <a:p>
+            <a:endParaRPr lang="en-US"/>
+          </a:p>
+        </p:txBody>
+      </p:sp>
+      <p:sp>
+        <p:nvSpPr>
+          <p:cNvPr id="28" name="Text 26"/>
+          <p:cNvSpPr/>
+          <p:nvPr/>
+        </p:nvSpPr>
+        <p:spPr>
+          <a:xfrm>
+            <a:off x="1051560" y="5404104"/>
+            <a:ext cx="9509760" cy="201168"/>
+          </a:xfrm>
+          <a:prstGeom prst="rect">
+            <a:avLst/>
+          </a:prstGeom>
+          <a:noFill/>
+          <a:ln/>
+        </p:spPr>
+        <p:txBody>
+          <a:bodyPr wrap="square" lIns="0" tIns="0" rIns="0" bIns="0" rtlCol="0" anchor="ctr"/>
+          <a:lstStyle/>
+          <a:p>
+            <a:pPr marL="0" indent="0" algn="ctr">
+              <a:buNone/>
+            </a:pPr>
+            <a:r>
+              <a:rPr lang="en-US" sz="1700" b="1" dirty="0">
+                <a:solidFill>
+                  <a:srgbClr val="1F2933"/>
+                </a:solidFill>
+              </a:rPr>
+              <a:t>The AI explanation should organize evidence — not create new evidence.</a:t>
+            </a:r>
+            <a:endParaRPr lang="en-US" sz="1700" dirty="0"/>
+          </a:p>
+        </p:txBody>
+      </p:sp>
+    </p:spTree>
+  </p:cSld>
+  <p:clrMapOvr>
+    <a:masterClrMapping/>
+  </p:clrMapOvr>
+</p:sld>
+</file>
+
+<file path=ppt/slides/slide16.xml><?xml version="1.0" encoding="utf-8"?>
+<p:sld xmlns:a="http://schemas.openxmlformats.org/drawingml/2006/main" xmlns:r="http://schemas.openxmlformats.org/officeDocument/2006/relationships" xmlns:p="http://schemas.openxmlformats.org/presentationml/2006/main">
+  <p:cSld>
+    <p:spTree>
+      <p:nvGrpSpPr>
+        <p:cNvPr id="1" name=""/>
+        <p:cNvGrpSpPr/>
+        <p:nvPr/>
+      </p:nvGrpSpPr>
+      <p:grpSpPr>
+        <a:xfrm>
+          <a:off x="0" y="0"/>
+          <a:ext cx="0" cy="0"/>
+          <a:chOff x="0" y="0"/>
+          <a:chExt cx="0" cy="0"/>
+        </a:xfrm>
+      </p:grpSpPr>
+      <p:sp>
+        <p:nvSpPr>
           <p:cNvPr id="2" name="Shape 0"/>
           <p:cNvSpPr/>
           <p:nvPr/>
@@ -7384,7 +7980,7 @@
 </p:sld>
 </file>
 
-<file path=ppt/slides/slide16.xml><?xml version="1.0" encoding="utf-8"?>
+<file path=ppt/slides/slide17.xml><?xml version="1.0" encoding="utf-8"?>
 <p:sld xmlns:a="http://schemas.openxmlformats.org/drawingml/2006/main" xmlns:r="http://schemas.openxmlformats.org/officeDocument/2006/relationships" xmlns:p="http://schemas.openxmlformats.org/presentationml/2006/main">
   <p:cSld name="Slide 6">
     <p:spTree>
@@ -7710,7 +8306,7 @@
 </p:sld>
 </file>
 
-<file path=ppt/slides/slide17.xml><?xml version="1.0" encoding="utf-8"?>
+<file path=ppt/slides/slide18.xml><?xml version="1.0" encoding="utf-8"?>
 <p:sld xmlns:a="http://schemas.openxmlformats.org/drawingml/2006/main" xmlns:r="http://schemas.openxmlformats.org/officeDocument/2006/relationships" xmlns:p="http://schemas.openxmlformats.org/presentationml/2006/main">
   <p:cSld>
     <p:spTree>
